--- a/dist/초2/수학/도형과측정/초2_수학_도형과측정_06_달력보기_학생용.pptx
+++ b/dist/초2/수학/도형과측정/초2_수학_도형과측정_06_달력보기_학생용.pptx
@@ -120,13 +120,13 @@
   <p:extLst>
     <p:ext uri="{521415D9-36F7-43E2-AB2F-B90AF26B5E84}">
       <p14:sectionLst xmlns:p14="http://schemas.microsoft.com/office/powerpoint/2010/main">
-        <p14:section name="도입" id="{ddb9918f-959b-9820-7944-75e94e222196}">
+        <p14:section name="도입" id="{900be0e5-b434-8d7a-023d-aab5c5a9d32e}">
           <p14:sldIdLst>
             <p14:sldId id="256"/>
             <p14:sldId id="257"/>
           </p14:sldIdLst>
         </p14:section>
-        <p14:section name="개념" id="{4b87ce1f-e3f1-98cb-646f-73234932f646}">
+        <p14:section name="개념" id="{9d8ba826-d35b-703f-6345-86212cb4b415}">
           <p14:sldIdLst>
             <p14:sldId id="258"/>
             <p14:sldId id="259"/>
@@ -135,31 +135,31 @@
             <p14:sldId id="264"/>
           </p14:sldIdLst>
         </p14:section>
-        <p14:section name="연습" id="{dd8020e0-6655-d974-f469-e8c2accdc7b7}">
+        <p14:section name="연습" id="{ce840417-466a-630d-b59f-e5997b98156b}">
           <p14:sldIdLst>
             <p14:sldId id="261"/>
             <p14:sldId id="262"/>
             <p14:sldId id="265"/>
           </p14:sldIdLst>
         </p14:section>
-        <p14:section name="개념" id="{aaf0ddc5-f4b4-40b7-b070-c5a04bf38f84}">
+        <p14:section name="개념" id="{2e6a1aca-281a-4fcd-c972-af48a7fc8bb2}">
           <p14:sldIdLst/>
         </p14:section>
-        <p14:section name="연습" id="{a2f687ec-b5e1-1910-fa97-4f716adb3685}">
+        <p14:section name="연습" id="{28ebf5e2-0356-619e-e2d2-d10623426223}">
           <p14:sldIdLst/>
         </p14:section>
-        <p14:section name="확인" id="{088c2740-36c5-bd3c-dc77-3d2ae3cb804f}">
+        <p14:section name="확인" id="{20fb7423-e14c-95ee-f89f-f0f21cc488ec}">
           <p14:sldIdLst>
             <p14:sldId id="266"/>
             <p14:sldId id="267"/>
           </p14:sldIdLst>
         </p14:section>
-        <p14:section name="정리" id="{f9e26701-9eea-7b04-447d-017c1854928d}">
+        <p14:section name="정리" id="{950b6316-b062-a4f6-3dd6-68e42811c63d}">
           <p14:sldIdLst>
             <p14:sldId id="268"/>
           </p14:sldIdLst>
         </p14:section>
-        <p14:section name="보충" id="{7af86c83-290a-1359-b252-215fbd7dca07}">
+        <p14:section name="보충" id="{152a45f5-e0d1-8a0b-76e1-300b2693c526}">
           <p14:sldIdLst>
             <p14:sldId id="269"/>
           </p14:sldIdLst>
@@ -2865,7 +2865,7 @@
           </p:nvPr>
         </p:nvGraphicFramePr>
         <p:xfrm>
-          <a:off x="7680960" y="1645920"/>
+          <a:off x="7680960" y="1670050"/>
           <a:ext cx="3931920" cy="914400"/>
         </p:xfrm>
         <a:graphic>
@@ -2881,7 +2881,7 @@
                 <a:gridCol w="561703"/>
                 <a:gridCol w="561703"/>
               </a:tblGrid>
-              <a:tr h="457200">
+              <a:tr h="433070">
                 <a:tc>
                   <a:txBody>
                     <a:bodyPr/>
@@ -3359,7 +3359,7 @@
                   </a:tcPr>
                 </a:tc>
               </a:tr>
-              <a:tr h="457200">
+              <a:tr h="433070">
                 <a:tc>
                   <a:txBody>
                     <a:bodyPr/>
@@ -4597,7 +4597,7 @@
           </p:nvPr>
         </p:nvGraphicFramePr>
         <p:xfrm>
-          <a:off x="6398514" y="2529840"/>
+          <a:off x="6398514" y="2579370"/>
           <a:ext cx="5120640" cy="914400"/>
         </p:xfrm>
         <a:graphic>
@@ -4613,7 +4613,7 @@
                 <a:gridCol w="731520"/>
                 <a:gridCol w="731520"/>
               </a:tblGrid>
-              <a:tr h="528320">
+              <a:tr h="511810">
                 <a:tc>
                   <a:txBody>
                     <a:bodyPr/>
@@ -5091,7 +5091,7 @@
                   </a:tcPr>
                 </a:tc>
               </a:tr>
-              <a:tr h="528320">
+              <a:tr h="511810">
                 <a:tc>
                   <a:txBody>
                     <a:bodyPr/>
@@ -5536,7 +5536,7 @@
                   </a:tcPr>
                 </a:tc>
               </a:tr>
-              <a:tr h="528320">
+              <a:tr h="511810">
                 <a:tc>
                   <a:txBody>
                     <a:bodyPr/>
@@ -6014,7 +6014,7 @@
                   </a:tcPr>
                 </a:tc>
               </a:tr>
-              <a:tr h="528320">
+              <a:tr h="511810">
                 <a:tc>
                   <a:txBody>
                     <a:bodyPr/>
@@ -6492,7 +6492,7 @@
                   </a:tcPr>
                 </a:tc>
               </a:tr>
-              <a:tr h="528320">
+              <a:tr h="511810">
                 <a:tc>
                   <a:txBody>
                     <a:bodyPr/>
@@ -6970,7 +6970,7 @@
                   </a:tcPr>
                 </a:tc>
               </a:tr>
-              <a:tr h="528320">
+              <a:tr h="511810">
                 <a:tc>
                   <a:txBody>
                     <a:bodyPr/>
@@ -10325,7 +10325,7 @@
           </p:nvPr>
         </p:nvGraphicFramePr>
         <p:xfrm>
-          <a:off x="2253996" y="1420622"/>
+          <a:off x="2253996" y="1470152"/>
           <a:ext cx="7680960" cy="914400"/>
         </p:xfrm>
         <a:graphic>
@@ -10341,7 +10341,7 @@
                 <a:gridCol w="1097280"/>
                 <a:gridCol w="1097280"/>
               </a:tblGrid>
-              <a:tr h="528320">
+              <a:tr h="511810">
                 <a:tc>
                   <a:txBody>
                     <a:bodyPr/>
@@ -10819,7 +10819,7 @@
                   </a:tcPr>
                 </a:tc>
               </a:tr>
-              <a:tr h="528320">
+              <a:tr h="511810">
                 <a:tc>
                   <a:txBody>
                     <a:bodyPr/>
@@ -11264,7 +11264,7 @@
                   </a:tcPr>
                 </a:tc>
               </a:tr>
-              <a:tr h="528320">
+              <a:tr h="511810">
                 <a:tc>
                   <a:txBody>
                     <a:bodyPr/>
@@ -11742,7 +11742,7 @@
                   </a:tcPr>
                 </a:tc>
               </a:tr>
-              <a:tr h="528320">
+              <a:tr h="511810">
                 <a:tc>
                   <a:txBody>
                     <a:bodyPr/>
@@ -12220,7 +12220,7 @@
                   </a:tcPr>
                 </a:tc>
               </a:tr>
-              <a:tr h="528320">
+              <a:tr h="511810">
                 <a:tc>
                   <a:txBody>
                     <a:bodyPr/>
@@ -12698,7 +12698,7 @@
                   </a:tcPr>
                 </a:tc>
               </a:tr>
-              <a:tr h="528320">
+              <a:tr h="511810">
                 <a:tc>
                   <a:txBody>
                     <a:bodyPr/>
@@ -13326,7 +13326,7 @@
           </p:nvPr>
         </p:nvGraphicFramePr>
         <p:xfrm>
-          <a:off x="6398514" y="2827020"/>
+          <a:off x="6398514" y="2876550"/>
           <a:ext cx="5120640" cy="914400"/>
         </p:xfrm>
         <a:graphic>
@@ -13342,7 +13342,7 @@
                 <a:gridCol w="731520"/>
                 <a:gridCol w="731520"/>
               </a:tblGrid>
-              <a:tr h="528320">
+              <a:tr h="511810">
                 <a:tc>
                   <a:txBody>
                     <a:bodyPr/>
@@ -13820,7 +13820,7 @@
                   </a:tcPr>
                 </a:tc>
               </a:tr>
-              <a:tr h="528320">
+              <a:tr h="511810">
                 <a:tc>
                   <a:txBody>
                     <a:bodyPr/>
@@ -14265,7 +14265,7 @@
                   </a:tcPr>
                 </a:tc>
               </a:tr>
-              <a:tr h="528320">
+              <a:tr h="511810">
                 <a:tc>
                   <a:txBody>
                     <a:bodyPr/>
@@ -14743,7 +14743,7 @@
                   </a:tcPr>
                 </a:tc>
               </a:tr>
-              <a:tr h="528320">
+              <a:tr h="511810">
                 <a:tc>
                   <a:txBody>
                     <a:bodyPr/>
@@ -15221,7 +15221,7 @@
                   </a:tcPr>
                 </a:tc>
               </a:tr>
-              <a:tr h="528320">
+              <a:tr h="511810">
                 <a:tc>
                   <a:txBody>
                     <a:bodyPr/>
@@ -15699,7 +15699,7 @@
                   </a:tcPr>
                 </a:tc>
               </a:tr>
-              <a:tr h="528320">
+              <a:tr h="511810">
                 <a:tc>
                   <a:txBody>
                     <a:bodyPr/>
@@ -18256,7 +18256,7 @@
           </p:nvPr>
         </p:nvGraphicFramePr>
         <p:xfrm>
-          <a:off x="6398514" y="2103120"/>
+          <a:off x="6398514" y="2030730"/>
           <a:ext cx="5120640" cy="914400"/>
         </p:xfrm>
         <a:graphic>
@@ -18272,7 +18272,7 @@
                 <a:gridCol w="731520"/>
                 <a:gridCol w="731520"/>
               </a:tblGrid>
-              <a:tr h="487680">
+              <a:tr h="511810">
                 <a:tc>
                   <a:txBody>
                     <a:bodyPr/>
@@ -18282,7 +18282,7 @@
                         <a:buNone/>
                       </a:pPr>
                       <a:r>
-                        <a:rPr lang="en-US" sz="2400" b="1" dirty="0">
+                        <a:rPr lang="en-US" sz="2600" b="1" dirty="0">
                           <a:solidFill>
                             <a:srgbClr val="1F2937"/>
                           </a:solidFill>
@@ -18292,7 +18292,7 @@
                         </a:rPr>
                         <a:t>일</a:t>
                       </a:r>
-                      <a:endParaRPr lang="en-US" sz="2400" dirty="0">
+                      <a:endParaRPr lang="en-US" sz="2600" dirty="0">
                         <a:latin typeface="맑은 고딕" charset="0"/>
                         <a:ea typeface="맑은 고딕" charset="0"/>
                         <a:cs typeface="맑은 고딕" charset="0"/>
@@ -18350,7 +18350,7 @@
                         <a:buNone/>
                       </a:pPr>
                       <a:r>
-                        <a:rPr lang="en-US" sz="2400" b="1" dirty="0">
+                        <a:rPr lang="en-US" sz="2600" b="1" dirty="0">
                           <a:solidFill>
                             <a:srgbClr val="1F2937"/>
                           </a:solidFill>
@@ -18360,7 +18360,7 @@
                         </a:rPr>
                         <a:t>월</a:t>
                       </a:r>
-                      <a:endParaRPr lang="en-US" sz="2400" dirty="0">
+                      <a:endParaRPr lang="en-US" sz="2600" dirty="0">
                         <a:latin typeface="맑은 고딕" charset="0"/>
                         <a:ea typeface="맑은 고딕" charset="0"/>
                         <a:cs typeface="맑은 고딕" charset="0"/>
@@ -18418,7 +18418,7 @@
                         <a:buNone/>
                       </a:pPr>
                       <a:r>
-                        <a:rPr lang="en-US" sz="2400" b="1" dirty="0">
+                        <a:rPr lang="en-US" sz="2600" b="1" dirty="0">
                           <a:solidFill>
                             <a:srgbClr val="1F2937"/>
                           </a:solidFill>
@@ -18428,7 +18428,7 @@
                         </a:rPr>
                         <a:t>화</a:t>
                       </a:r>
-                      <a:endParaRPr lang="en-US" sz="2400" dirty="0">
+                      <a:endParaRPr lang="en-US" sz="2600" dirty="0">
                         <a:latin typeface="맑은 고딕" charset="0"/>
                         <a:ea typeface="맑은 고딕" charset="0"/>
                         <a:cs typeface="맑은 고딕" charset="0"/>
@@ -18486,7 +18486,7 @@
                         <a:buNone/>
                       </a:pPr>
                       <a:r>
-                        <a:rPr lang="en-US" sz="2400" b="1" dirty="0">
+                        <a:rPr lang="en-US" sz="2600" b="1" dirty="0">
                           <a:solidFill>
                             <a:srgbClr val="1F2937"/>
                           </a:solidFill>
@@ -18496,7 +18496,7 @@
                         </a:rPr>
                         <a:t>수</a:t>
                       </a:r>
-                      <a:endParaRPr lang="en-US" sz="2400" dirty="0">
+                      <a:endParaRPr lang="en-US" sz="2600" dirty="0">
                         <a:latin typeface="맑은 고딕" charset="0"/>
                         <a:ea typeface="맑은 고딕" charset="0"/>
                         <a:cs typeface="맑은 고딕" charset="0"/>
@@ -18554,7 +18554,7 @@
                         <a:buNone/>
                       </a:pPr>
                       <a:r>
-                        <a:rPr lang="en-US" sz="2400" b="1" dirty="0">
+                        <a:rPr lang="en-US" sz="2600" b="1" dirty="0">
                           <a:solidFill>
                             <a:srgbClr val="1F2937"/>
                           </a:solidFill>
@@ -18564,7 +18564,7 @@
                         </a:rPr>
                         <a:t>목</a:t>
                       </a:r>
-                      <a:endParaRPr lang="en-US" sz="2400" dirty="0">
+                      <a:endParaRPr lang="en-US" sz="2600" dirty="0">
                         <a:latin typeface="맑은 고딕" charset="0"/>
                         <a:ea typeface="맑은 고딕" charset="0"/>
                         <a:cs typeface="맑은 고딕" charset="0"/>
@@ -18622,7 +18622,7 @@
                         <a:buNone/>
                       </a:pPr>
                       <a:r>
-                        <a:rPr lang="en-US" sz="2400" b="1" dirty="0">
+                        <a:rPr lang="en-US" sz="2600" b="1" dirty="0">
                           <a:solidFill>
                             <a:srgbClr val="1F2937"/>
                           </a:solidFill>
@@ -18632,7 +18632,7 @@
                         </a:rPr>
                         <a:t>금</a:t>
                       </a:r>
-                      <a:endParaRPr lang="en-US" sz="2400" dirty="0">
+                      <a:endParaRPr lang="en-US" sz="2600" dirty="0">
                         <a:latin typeface="맑은 고딕" charset="0"/>
                         <a:ea typeface="맑은 고딕" charset="0"/>
                         <a:cs typeface="맑은 고딕" charset="0"/>
@@ -18690,7 +18690,7 @@
                         <a:buNone/>
                       </a:pPr>
                       <a:r>
-                        <a:rPr lang="en-US" sz="2400" b="1" dirty="0">
+                        <a:rPr lang="en-US" sz="2600" b="1" dirty="0">
                           <a:solidFill>
                             <a:srgbClr val="1F2937"/>
                           </a:solidFill>
@@ -18700,7 +18700,7 @@
                         </a:rPr>
                         <a:t>토</a:t>
                       </a:r>
-                      <a:endParaRPr lang="en-US" sz="2400" dirty="0">
+                      <a:endParaRPr lang="en-US" sz="2600" dirty="0">
                         <a:latin typeface="맑은 고딕" charset="0"/>
                         <a:ea typeface="맑은 고딕" charset="0"/>
                         <a:cs typeface="맑은 고딕" charset="0"/>
@@ -18750,7 +18750,7 @@
                   </a:tcPr>
                 </a:tc>
               </a:tr>
-              <a:tr h="487680">
+              <a:tr h="511810">
                 <a:tc>
                   <a:txBody>
                     <a:bodyPr/>
@@ -18759,7 +18759,7 @@
                       <a:pPr eaLnBrk="0" algn="ctr" indent="0" marL="0">
                         <a:buNone/>
                       </a:pPr>
-                      <a:endParaRPr lang="en-US" sz="2400" dirty="0">
+                      <a:endParaRPr lang="en-US" sz="2600" dirty="0">
                         <a:latin typeface="맑은 고딕" charset="0"/>
                         <a:ea typeface="맑은 고딕" charset="0"/>
                         <a:cs typeface="맑은 고딕" charset="0"/>
@@ -18816,7 +18816,7 @@
                       <a:pPr eaLnBrk="0" algn="ctr" indent="0" marL="0">
                         <a:buNone/>
                       </a:pPr>
-                      <a:endParaRPr lang="en-US" sz="2400" dirty="0">
+                      <a:endParaRPr lang="en-US" sz="2600" dirty="0">
                         <a:latin typeface="맑은 고딕" charset="0"/>
                         <a:ea typeface="맑은 고딕" charset="0"/>
                         <a:cs typeface="맑은 고딕" charset="0"/>
@@ -18873,7 +18873,7 @@
                       <a:pPr eaLnBrk="0" algn="ctr" indent="0" marL="0">
                         <a:buNone/>
                       </a:pPr>
-                      <a:endParaRPr lang="en-US" sz="2400" dirty="0">
+                      <a:endParaRPr lang="en-US" sz="2600" dirty="0">
                         <a:latin typeface="맑은 고딕" charset="0"/>
                         <a:ea typeface="맑은 고딕" charset="0"/>
                         <a:cs typeface="맑은 고딕" charset="0"/>
@@ -18931,7 +18931,7 @@
                         <a:buNone/>
                       </a:pPr>
                       <a:r>
-                        <a:rPr lang="en-US" sz="2400" dirty="0">
+                        <a:rPr lang="en-US" sz="2600" dirty="0">
                           <a:solidFill>
                             <a:srgbClr val="1F2937"/>
                           </a:solidFill>
@@ -18941,7 +18941,7 @@
                         </a:rPr>
                         <a:t>1</a:t>
                       </a:r>
-                      <a:endParaRPr lang="en-US" sz="2400" dirty="0">
+                      <a:endParaRPr lang="en-US" sz="2600" dirty="0">
                         <a:latin typeface="맑은 고딕" charset="0"/>
                         <a:ea typeface="맑은 고딕" charset="0"/>
                         <a:cs typeface="맑은 고딕" charset="0"/>
@@ -18999,7 +18999,7 @@
                         <a:buNone/>
                       </a:pPr>
                       <a:r>
-                        <a:rPr lang="en-US" sz="2400" dirty="0">
+                        <a:rPr lang="en-US" sz="2600" dirty="0">
                           <a:solidFill>
                             <a:srgbClr val="1F2937"/>
                           </a:solidFill>
@@ -19009,7 +19009,7 @@
                         </a:rPr>
                         <a:t>2</a:t>
                       </a:r>
-                      <a:endParaRPr lang="en-US" sz="2400" dirty="0">
+                      <a:endParaRPr lang="en-US" sz="2600" dirty="0">
                         <a:latin typeface="맑은 고딕" charset="0"/>
                         <a:ea typeface="맑은 고딕" charset="0"/>
                         <a:cs typeface="맑은 고딕" charset="0"/>
@@ -19067,7 +19067,7 @@
                         <a:buNone/>
                       </a:pPr>
                       <a:r>
-                        <a:rPr lang="en-US" sz="2400" dirty="0">
+                        <a:rPr lang="en-US" sz="2600" dirty="0">
                           <a:solidFill>
                             <a:srgbClr val="1F2937"/>
                           </a:solidFill>
@@ -19077,7 +19077,7 @@
                         </a:rPr>
                         <a:t>3</a:t>
                       </a:r>
-                      <a:endParaRPr lang="en-US" sz="2400" dirty="0">
+                      <a:endParaRPr lang="en-US" sz="2600" dirty="0">
                         <a:latin typeface="맑은 고딕" charset="0"/>
                         <a:ea typeface="맑은 고딕" charset="0"/>
                         <a:cs typeface="맑은 고딕" charset="0"/>
@@ -19135,7 +19135,7 @@
                         <a:buNone/>
                       </a:pPr>
                       <a:r>
-                        <a:rPr lang="en-US" sz="2400" dirty="0">
+                        <a:rPr lang="en-US" sz="2600" dirty="0">
                           <a:solidFill>
                             <a:srgbClr val="1F2937"/>
                           </a:solidFill>
@@ -19145,7 +19145,7 @@
                         </a:rPr>
                         <a:t>4</a:t>
                       </a:r>
-                      <a:endParaRPr lang="en-US" sz="2400" dirty="0">
+                      <a:endParaRPr lang="en-US" sz="2600" dirty="0">
                         <a:latin typeface="맑은 고딕" charset="0"/>
                         <a:ea typeface="맑은 고딕" charset="0"/>
                         <a:cs typeface="맑은 고딕" charset="0"/>
@@ -19195,7 +19195,7 @@
                   </a:tcPr>
                 </a:tc>
               </a:tr>
-              <a:tr h="487680">
+              <a:tr h="511810">
                 <a:tc>
                   <a:txBody>
                     <a:bodyPr/>
@@ -19205,7 +19205,7 @@
                         <a:buNone/>
                       </a:pPr>
                       <a:r>
-                        <a:rPr lang="en-US" sz="2400" dirty="0">
+                        <a:rPr lang="en-US" sz="2600" dirty="0">
                           <a:solidFill>
                             <a:srgbClr val="1F2937"/>
                           </a:solidFill>
@@ -19215,7 +19215,7 @@
                         </a:rPr>
                         <a:t>5</a:t>
                       </a:r>
-                      <a:endParaRPr lang="en-US" sz="2400" dirty="0">
+                      <a:endParaRPr lang="en-US" sz="2600" dirty="0">
                         <a:latin typeface="맑은 고딕" charset="0"/>
                         <a:ea typeface="맑은 고딕" charset="0"/>
                         <a:cs typeface="맑은 고딕" charset="0"/>
@@ -19273,7 +19273,7 @@
                         <a:buNone/>
                       </a:pPr>
                       <a:r>
-                        <a:rPr lang="en-US" sz="2400" dirty="0">
+                        <a:rPr lang="en-US" sz="2600" dirty="0">
                           <a:solidFill>
                             <a:srgbClr val="1F2937"/>
                           </a:solidFill>
@@ -19283,7 +19283,7 @@
                         </a:rPr>
                         <a:t>6</a:t>
                       </a:r>
-                      <a:endParaRPr lang="en-US" sz="2400" dirty="0">
+                      <a:endParaRPr lang="en-US" sz="2600" dirty="0">
                         <a:latin typeface="맑은 고딕" charset="0"/>
                         <a:ea typeface="맑은 고딕" charset="0"/>
                         <a:cs typeface="맑은 고딕" charset="0"/>
@@ -19341,7 +19341,7 @@
                         <a:buNone/>
                       </a:pPr>
                       <a:r>
-                        <a:rPr lang="en-US" sz="2400" dirty="0">
+                        <a:rPr lang="en-US" sz="2600" dirty="0">
                           <a:solidFill>
                             <a:srgbClr val="1F2937"/>
                           </a:solidFill>
@@ -19351,7 +19351,7 @@
                         </a:rPr>
                         <a:t>7</a:t>
                       </a:r>
-                      <a:endParaRPr lang="en-US" sz="2400" dirty="0">
+                      <a:endParaRPr lang="en-US" sz="2600" dirty="0">
                         <a:latin typeface="맑은 고딕" charset="0"/>
                         <a:ea typeface="맑은 고딕" charset="0"/>
                         <a:cs typeface="맑은 고딕" charset="0"/>
@@ -19409,7 +19409,7 @@
                         <a:buNone/>
                       </a:pPr>
                       <a:r>
-                        <a:rPr lang="en-US" sz="2400" dirty="0">
+                        <a:rPr lang="en-US" sz="2600" dirty="0">
                           <a:solidFill>
                             <a:srgbClr val="1F2937"/>
                           </a:solidFill>
@@ -19419,7 +19419,7 @@
                         </a:rPr>
                         <a:t>8</a:t>
                       </a:r>
-                      <a:endParaRPr lang="en-US" sz="2400" dirty="0">
+                      <a:endParaRPr lang="en-US" sz="2600" dirty="0">
                         <a:latin typeface="맑은 고딕" charset="0"/>
                         <a:ea typeface="맑은 고딕" charset="0"/>
                         <a:cs typeface="맑은 고딕" charset="0"/>
@@ -19477,7 +19477,7 @@
                         <a:buNone/>
                       </a:pPr>
                       <a:r>
-                        <a:rPr lang="en-US" sz="2400" dirty="0">
+                        <a:rPr lang="en-US" sz="2600" dirty="0">
                           <a:solidFill>
                             <a:srgbClr val="1F2937"/>
                           </a:solidFill>
@@ -19487,7 +19487,7 @@
                         </a:rPr>
                         <a:t>9</a:t>
                       </a:r>
-                      <a:endParaRPr lang="en-US" sz="2400" dirty="0">
+                      <a:endParaRPr lang="en-US" sz="2600" dirty="0">
                         <a:latin typeface="맑은 고딕" charset="0"/>
                         <a:ea typeface="맑은 고딕" charset="0"/>
                         <a:cs typeface="맑은 고딕" charset="0"/>
@@ -19545,7 +19545,7 @@
                         <a:buNone/>
                       </a:pPr>
                       <a:r>
-                        <a:rPr lang="en-US" sz="2400" dirty="0">
+                        <a:rPr lang="en-US" sz="2600" dirty="0">
                           <a:solidFill>
                             <a:srgbClr val="1F2937"/>
                           </a:solidFill>
@@ -19555,7 +19555,7 @@
                         </a:rPr>
                         <a:t>10</a:t>
                       </a:r>
-                      <a:endParaRPr lang="en-US" sz="2400" dirty="0">
+                      <a:endParaRPr lang="en-US" sz="2600" dirty="0">
                         <a:latin typeface="맑은 고딕" charset="0"/>
                         <a:ea typeface="맑은 고딕" charset="0"/>
                         <a:cs typeface="맑은 고딕" charset="0"/>
@@ -19613,7 +19613,7 @@
                         <a:buNone/>
                       </a:pPr>
                       <a:r>
-                        <a:rPr lang="en-US" sz="2400" dirty="0">
+                        <a:rPr lang="en-US" sz="2600" dirty="0">
                           <a:solidFill>
                             <a:srgbClr val="1F2937"/>
                           </a:solidFill>
@@ -19623,7 +19623,7 @@
                         </a:rPr>
                         <a:t>11</a:t>
                       </a:r>
-                      <a:endParaRPr lang="en-US" sz="2400" dirty="0">
+                      <a:endParaRPr lang="en-US" sz="2600" dirty="0">
                         <a:latin typeface="맑은 고딕" charset="0"/>
                         <a:ea typeface="맑은 고딕" charset="0"/>
                         <a:cs typeface="맑은 고딕" charset="0"/>
@@ -19673,7 +19673,7 @@
                   </a:tcPr>
                 </a:tc>
               </a:tr>
-              <a:tr h="487680">
+              <a:tr h="511810">
                 <a:tc>
                   <a:txBody>
                     <a:bodyPr/>
@@ -19683,7 +19683,7 @@
                         <a:buNone/>
                       </a:pPr>
                       <a:r>
-                        <a:rPr lang="en-US" sz="2400" dirty="0">
+                        <a:rPr lang="en-US" sz="2600" dirty="0">
                           <a:solidFill>
                             <a:srgbClr val="1F2937"/>
                           </a:solidFill>
@@ -19693,7 +19693,7 @@
                         </a:rPr>
                         <a:t>12</a:t>
                       </a:r>
-                      <a:endParaRPr lang="en-US" sz="2400" dirty="0">
+                      <a:endParaRPr lang="en-US" sz="2600" dirty="0">
                         <a:latin typeface="맑은 고딕" charset="0"/>
                         <a:ea typeface="맑은 고딕" charset="0"/>
                         <a:cs typeface="맑은 고딕" charset="0"/>
@@ -19751,7 +19751,7 @@
                         <a:buNone/>
                       </a:pPr>
                       <a:r>
-                        <a:rPr lang="en-US" sz="2400" dirty="0">
+                        <a:rPr lang="en-US" sz="2600" dirty="0">
                           <a:solidFill>
                             <a:srgbClr val="1F2937"/>
                           </a:solidFill>
@@ -19761,7 +19761,7 @@
                         </a:rPr>
                         <a:t>13</a:t>
                       </a:r>
-                      <a:endParaRPr lang="en-US" sz="2400" dirty="0">
+                      <a:endParaRPr lang="en-US" sz="2600" dirty="0">
                         <a:latin typeface="맑은 고딕" charset="0"/>
                         <a:ea typeface="맑은 고딕" charset="0"/>
                         <a:cs typeface="맑은 고딕" charset="0"/>
@@ -19819,7 +19819,7 @@
                         <a:buNone/>
                       </a:pPr>
                       <a:r>
-                        <a:rPr lang="en-US" sz="2400" dirty="0">
+                        <a:rPr lang="en-US" sz="2600" dirty="0">
                           <a:solidFill>
                             <a:srgbClr val="1F2937"/>
                           </a:solidFill>
@@ -19829,7 +19829,7 @@
                         </a:rPr>
                         <a:t>14</a:t>
                       </a:r>
-                      <a:endParaRPr lang="en-US" sz="2400" dirty="0">
+                      <a:endParaRPr lang="en-US" sz="2600" dirty="0">
                         <a:latin typeface="맑은 고딕" charset="0"/>
                         <a:ea typeface="맑은 고딕" charset="0"/>
                         <a:cs typeface="맑은 고딕" charset="0"/>
@@ -19887,7 +19887,7 @@
                         <a:buNone/>
                       </a:pPr>
                       <a:r>
-                        <a:rPr lang="en-US" sz="2400" dirty="0">
+                        <a:rPr lang="en-US" sz="2600" dirty="0">
                           <a:solidFill>
                             <a:srgbClr val="1F2937"/>
                           </a:solidFill>
@@ -19897,7 +19897,7 @@
                         </a:rPr>
                         <a:t>15</a:t>
                       </a:r>
-                      <a:endParaRPr lang="en-US" sz="2400" dirty="0">
+                      <a:endParaRPr lang="en-US" sz="2600" dirty="0">
                         <a:latin typeface="맑은 고딕" charset="0"/>
                         <a:ea typeface="맑은 고딕" charset="0"/>
                         <a:cs typeface="맑은 고딕" charset="0"/>
@@ -19955,7 +19955,7 @@
                         <a:buNone/>
                       </a:pPr>
                       <a:r>
-                        <a:rPr lang="en-US" sz="2400" dirty="0">
+                        <a:rPr lang="en-US" sz="2600" dirty="0">
                           <a:solidFill>
                             <a:srgbClr val="1F2937"/>
                           </a:solidFill>
@@ -19965,7 +19965,7 @@
                         </a:rPr>
                         <a:t>16</a:t>
                       </a:r>
-                      <a:endParaRPr lang="en-US" sz="2400" dirty="0">
+                      <a:endParaRPr lang="en-US" sz="2600" dirty="0">
                         <a:latin typeface="맑은 고딕" charset="0"/>
                         <a:ea typeface="맑은 고딕" charset="0"/>
                         <a:cs typeface="맑은 고딕" charset="0"/>
@@ -20023,7 +20023,7 @@
                         <a:buNone/>
                       </a:pPr>
                       <a:r>
-                        <a:rPr lang="en-US" sz="2400" dirty="0">
+                        <a:rPr lang="en-US" sz="2600" dirty="0">
                           <a:solidFill>
                             <a:srgbClr val="1F2937"/>
                           </a:solidFill>
@@ -20033,7 +20033,7 @@
                         </a:rPr>
                         <a:t>17</a:t>
                       </a:r>
-                      <a:endParaRPr lang="en-US" sz="2400" dirty="0">
+                      <a:endParaRPr lang="en-US" sz="2600" dirty="0">
                         <a:latin typeface="맑은 고딕" charset="0"/>
                         <a:ea typeface="맑은 고딕" charset="0"/>
                         <a:cs typeface="맑은 고딕" charset="0"/>
@@ -20091,7 +20091,7 @@
                         <a:buNone/>
                       </a:pPr>
                       <a:r>
-                        <a:rPr lang="en-US" sz="2400" dirty="0">
+                        <a:rPr lang="en-US" sz="2600" dirty="0">
                           <a:solidFill>
                             <a:srgbClr val="1F2937"/>
                           </a:solidFill>
@@ -20101,7 +20101,7 @@
                         </a:rPr>
                         <a:t>18</a:t>
                       </a:r>
-                      <a:endParaRPr lang="en-US" sz="2400" dirty="0">
+                      <a:endParaRPr lang="en-US" sz="2600" dirty="0">
                         <a:latin typeface="맑은 고딕" charset="0"/>
                         <a:ea typeface="맑은 고딕" charset="0"/>
                         <a:cs typeface="맑은 고딕" charset="0"/>
@@ -20151,7 +20151,7 @@
                   </a:tcPr>
                 </a:tc>
               </a:tr>
-              <a:tr h="487680">
+              <a:tr h="511810">
                 <a:tc>
                   <a:txBody>
                     <a:bodyPr/>
@@ -20161,7 +20161,7 @@
                         <a:buNone/>
                       </a:pPr>
                       <a:r>
-                        <a:rPr lang="en-US" sz="2400" dirty="0">
+                        <a:rPr lang="en-US" sz="2600" dirty="0">
                           <a:solidFill>
                             <a:srgbClr val="1F2937"/>
                           </a:solidFill>
@@ -20171,7 +20171,7 @@
                         </a:rPr>
                         <a:t>19</a:t>
                       </a:r>
-                      <a:endParaRPr lang="en-US" sz="2400" dirty="0">
+                      <a:endParaRPr lang="en-US" sz="2600" dirty="0">
                         <a:latin typeface="맑은 고딕" charset="0"/>
                         <a:ea typeface="맑은 고딕" charset="0"/>
                         <a:cs typeface="맑은 고딕" charset="0"/>
@@ -20229,7 +20229,7 @@
                         <a:buNone/>
                       </a:pPr>
                       <a:r>
-                        <a:rPr lang="en-US" sz="2400" dirty="0">
+                        <a:rPr lang="en-US" sz="2600" dirty="0">
                           <a:solidFill>
                             <a:srgbClr val="1F2937"/>
                           </a:solidFill>
@@ -20239,7 +20239,7 @@
                         </a:rPr>
                         <a:t>20</a:t>
                       </a:r>
-                      <a:endParaRPr lang="en-US" sz="2400" dirty="0">
+                      <a:endParaRPr lang="en-US" sz="2600" dirty="0">
                         <a:latin typeface="맑은 고딕" charset="0"/>
                         <a:ea typeface="맑은 고딕" charset="0"/>
                         <a:cs typeface="맑은 고딕" charset="0"/>
@@ -20297,7 +20297,7 @@
                         <a:buNone/>
                       </a:pPr>
                       <a:r>
-                        <a:rPr lang="en-US" sz="2400" dirty="0">
+                        <a:rPr lang="en-US" sz="2600" dirty="0">
                           <a:solidFill>
                             <a:srgbClr val="1F2937"/>
                           </a:solidFill>
@@ -20307,7 +20307,7 @@
                         </a:rPr>
                         <a:t>21</a:t>
                       </a:r>
-                      <a:endParaRPr lang="en-US" sz="2400" dirty="0">
+                      <a:endParaRPr lang="en-US" sz="2600" dirty="0">
                         <a:latin typeface="맑은 고딕" charset="0"/>
                         <a:ea typeface="맑은 고딕" charset="0"/>
                         <a:cs typeface="맑은 고딕" charset="0"/>
@@ -20365,7 +20365,7 @@
                         <a:buNone/>
                       </a:pPr>
                       <a:r>
-                        <a:rPr lang="en-US" sz="2400" dirty="0">
+                        <a:rPr lang="en-US" sz="2600" dirty="0">
                           <a:solidFill>
                             <a:srgbClr val="1F2937"/>
                           </a:solidFill>
@@ -20375,7 +20375,7 @@
                         </a:rPr>
                         <a:t>22</a:t>
                       </a:r>
-                      <a:endParaRPr lang="en-US" sz="2400" dirty="0">
+                      <a:endParaRPr lang="en-US" sz="2600" dirty="0">
                         <a:latin typeface="맑은 고딕" charset="0"/>
                         <a:ea typeface="맑은 고딕" charset="0"/>
                         <a:cs typeface="맑은 고딕" charset="0"/>
@@ -20433,7 +20433,7 @@
                         <a:buNone/>
                       </a:pPr>
                       <a:r>
-                        <a:rPr lang="en-US" sz="2400" dirty="0">
+                        <a:rPr lang="en-US" sz="2600" dirty="0">
                           <a:solidFill>
                             <a:srgbClr val="1F2937"/>
                           </a:solidFill>
@@ -20443,7 +20443,7 @@
                         </a:rPr>
                         <a:t>23</a:t>
                       </a:r>
-                      <a:endParaRPr lang="en-US" sz="2400" dirty="0">
+                      <a:endParaRPr lang="en-US" sz="2600" dirty="0">
                         <a:latin typeface="맑은 고딕" charset="0"/>
                         <a:ea typeface="맑은 고딕" charset="0"/>
                         <a:cs typeface="맑은 고딕" charset="0"/>
@@ -20501,7 +20501,7 @@
                         <a:buNone/>
                       </a:pPr>
                       <a:r>
-                        <a:rPr lang="en-US" sz="2400" dirty="0">
+                        <a:rPr lang="en-US" sz="2600" dirty="0">
                           <a:solidFill>
                             <a:srgbClr val="1F2937"/>
                           </a:solidFill>
@@ -20511,7 +20511,7 @@
                         </a:rPr>
                         <a:t>24</a:t>
                       </a:r>
-                      <a:endParaRPr lang="en-US" sz="2400" dirty="0">
+                      <a:endParaRPr lang="en-US" sz="2600" dirty="0">
                         <a:latin typeface="맑은 고딕" charset="0"/>
                         <a:ea typeface="맑은 고딕" charset="0"/>
                         <a:cs typeface="맑은 고딕" charset="0"/>
@@ -20569,7 +20569,7 @@
                         <a:buNone/>
                       </a:pPr>
                       <a:r>
-                        <a:rPr lang="en-US" sz="2400" dirty="0">
+                        <a:rPr lang="en-US" sz="2600" dirty="0">
                           <a:solidFill>
                             <a:srgbClr val="1F2937"/>
                           </a:solidFill>
@@ -20579,7 +20579,7 @@
                         </a:rPr>
                         <a:t>25</a:t>
                       </a:r>
-                      <a:endParaRPr lang="en-US" sz="2400" dirty="0">
+                      <a:endParaRPr lang="en-US" sz="2600" dirty="0">
                         <a:latin typeface="맑은 고딕" charset="0"/>
                         <a:ea typeface="맑은 고딕" charset="0"/>
                         <a:cs typeface="맑은 고딕" charset="0"/>
@@ -20629,7 +20629,7 @@
                   </a:tcPr>
                 </a:tc>
               </a:tr>
-              <a:tr h="487680">
+              <a:tr h="511810">
                 <a:tc>
                   <a:txBody>
                     <a:bodyPr/>
@@ -20639,7 +20639,7 @@
                         <a:buNone/>
                       </a:pPr>
                       <a:r>
-                        <a:rPr lang="en-US" sz="2400" dirty="0">
+                        <a:rPr lang="en-US" sz="2600" dirty="0">
                           <a:solidFill>
                             <a:srgbClr val="1F2937"/>
                           </a:solidFill>
@@ -20649,7 +20649,7 @@
                         </a:rPr>
                         <a:t>26</a:t>
                       </a:r>
-                      <a:endParaRPr lang="en-US" sz="2400" dirty="0">
+                      <a:endParaRPr lang="en-US" sz="2600" dirty="0">
                         <a:latin typeface="맑은 고딕" charset="0"/>
                         <a:ea typeface="맑은 고딕" charset="0"/>
                         <a:cs typeface="맑은 고딕" charset="0"/>
@@ -20707,7 +20707,7 @@
                         <a:buNone/>
                       </a:pPr>
                       <a:r>
-                        <a:rPr lang="en-US" sz="2400" dirty="0">
+                        <a:rPr lang="en-US" sz="2600" dirty="0">
                           <a:solidFill>
                             <a:srgbClr val="1F2937"/>
                           </a:solidFill>
@@ -20717,7 +20717,7 @@
                         </a:rPr>
                         <a:t>27</a:t>
                       </a:r>
-                      <a:endParaRPr lang="en-US" sz="2400" dirty="0">
+                      <a:endParaRPr lang="en-US" sz="2600" dirty="0">
                         <a:latin typeface="맑은 고딕" charset="0"/>
                         <a:ea typeface="맑은 고딕" charset="0"/>
                         <a:cs typeface="맑은 고딕" charset="0"/>
@@ -20775,7 +20775,7 @@
                         <a:buNone/>
                       </a:pPr>
                       <a:r>
-                        <a:rPr lang="en-US" sz="2400" dirty="0">
+                        <a:rPr lang="en-US" sz="2600" dirty="0">
                           <a:solidFill>
                             <a:srgbClr val="1F2937"/>
                           </a:solidFill>
@@ -20785,7 +20785,7 @@
                         </a:rPr>
                         <a:t>28</a:t>
                       </a:r>
-                      <a:endParaRPr lang="en-US" sz="2400" dirty="0">
+                      <a:endParaRPr lang="en-US" sz="2600" dirty="0">
                         <a:latin typeface="맑은 고딕" charset="0"/>
                         <a:ea typeface="맑은 고딕" charset="0"/>
                         <a:cs typeface="맑은 고딕" charset="0"/>
@@ -20843,7 +20843,7 @@
                         <a:buNone/>
                       </a:pPr>
                       <a:r>
-                        <a:rPr lang="en-US" sz="2400" dirty="0">
+                        <a:rPr lang="en-US" sz="2600" dirty="0">
                           <a:solidFill>
                             <a:srgbClr val="1F2937"/>
                           </a:solidFill>
@@ -20853,7 +20853,7 @@
                         </a:rPr>
                         <a:t>29</a:t>
                       </a:r>
-                      <a:endParaRPr lang="en-US" sz="2400" dirty="0">
+                      <a:endParaRPr lang="en-US" sz="2600" dirty="0">
                         <a:latin typeface="맑은 고딕" charset="0"/>
                         <a:ea typeface="맑은 고딕" charset="0"/>
                         <a:cs typeface="맑은 고딕" charset="0"/>
@@ -20911,7 +20911,7 @@
                         <a:buNone/>
                       </a:pPr>
                       <a:r>
-                        <a:rPr lang="en-US" sz="2400" dirty="0">
+                        <a:rPr lang="en-US" sz="2600" dirty="0">
                           <a:solidFill>
                             <a:srgbClr val="1F2937"/>
                           </a:solidFill>
@@ -20921,7 +20921,7 @@
                         </a:rPr>
                         <a:t>30</a:t>
                       </a:r>
-                      <a:endParaRPr lang="en-US" sz="2400" dirty="0">
+                      <a:endParaRPr lang="en-US" sz="2600" dirty="0">
                         <a:latin typeface="맑은 고딕" charset="0"/>
                         <a:ea typeface="맑은 고딕" charset="0"/>
                         <a:cs typeface="맑은 고딕" charset="0"/>
@@ -20978,7 +20978,7 @@
                       <a:pPr eaLnBrk="0" algn="ctr" indent="0" marL="0">
                         <a:buNone/>
                       </a:pPr>
-                      <a:endParaRPr lang="en-US" sz="2400" dirty="0">
+                      <a:endParaRPr lang="en-US" sz="2600" dirty="0">
                         <a:latin typeface="맑은 고딕" charset="0"/>
                         <a:ea typeface="맑은 고딕" charset="0"/>
                         <a:cs typeface="맑은 고딕" charset="0"/>
@@ -21035,7 +21035,7 @@
                       <a:pPr eaLnBrk="0" algn="ctr" indent="0" marL="0">
                         <a:buNone/>
                       </a:pPr>
-                      <a:endParaRPr lang="en-US" sz="2400" dirty="0">
+                      <a:endParaRPr lang="en-US" sz="2600" dirty="0">
                         <a:latin typeface="맑은 고딕" charset="0"/>
                         <a:ea typeface="맑은 고딕" charset="0"/>
                         <a:cs typeface="맑은 고딕" charset="0"/>
@@ -23244,7 +23244,7 @@
           </p:nvPr>
         </p:nvGraphicFramePr>
         <p:xfrm>
-          <a:off x="1248156" y="2509520"/>
+          <a:off x="1248156" y="2542540"/>
           <a:ext cx="9692640" cy="914400"/>
         </p:xfrm>
         <a:graphic>
@@ -23255,7 +23255,7 @@
                 <a:gridCol w="3101645"/>
                 <a:gridCol w="6590995"/>
               </a:tblGrid>
-              <a:tr h="528320">
+              <a:tr h="511810">
                 <a:tc>
                   <a:txBody>
                     <a:bodyPr/>
@@ -23393,7 +23393,7 @@
                   </a:tcPr>
                 </a:tc>
               </a:tr>
-              <a:tr h="528320">
+              <a:tr h="511810">
                 <a:tc>
                   <a:txBody>
                     <a:bodyPr/>
@@ -23531,7 +23531,7 @@
                   </a:tcPr>
                 </a:tc>
               </a:tr>
-              <a:tr h="528320">
+              <a:tr h="511810">
                 <a:tc>
                   <a:txBody>
                     <a:bodyPr/>
@@ -23669,7 +23669,7 @@
                   </a:tcPr>
                 </a:tc>
               </a:tr>
-              <a:tr h="528320">
+              <a:tr h="511810">
                 <a:tc>
                   <a:txBody>
                     <a:bodyPr/>
